--- a/docs/submission/deck/FindYourDent-AI-Builder-Cup-2026.pptx
+++ b/docs/submission/deck/FindYourDent-AI-Builder-Cup-2026.pptx
@@ -7131,7 +7131,7 @@
                 <a:cs typeface="Google Sans Flex"/>
                 <a:sym typeface="Google Sans Flex"/>
               </a:rPr>
-              <a:t>FindYourDent</a:t>
+              <a:t>SabiqLab</a:t>
             </a:r>
             <a:endParaRPr sz="1800">
               <a:latin typeface="Google Sans Flex"/>
